--- a/open-research-principles/preregistration/preregistration-slides.pptx
+++ b/open-research-principles/preregistration/preregistration-slides.pptx
@@ -3774,7 +3774,7 @@
             </a:pPr>
             <a:r>
               <a:rPr/>
-              <a:t>14/10/2026</a:t>
+              <a:t>19/10/2026</a:t>
             </a:r>
           </a:p>
         </p:txBody>
